--- a/Onyx_進度報告_1006.pptx
+++ b/Onyx_進度報告_1006.pptx
@@ -5,7 +5,7 @@
     <p:sldMasterId id="2147483658" r:id="rId1"/>
   </p:sldMasterIdLst>
   <p:notesMasterIdLst>
-    <p:notesMasterId r:id="rId11"/>
+    <p:notesMasterId r:id="rId13"/>
   </p:notesMasterIdLst>
   <p:sldIdLst>
     <p:sldId id="277" r:id="rId2"/>
@@ -16,7 +16,9 @@
     <p:sldId id="2013" r:id="rId7"/>
     <p:sldId id="2019" r:id="rId8"/>
     <p:sldId id="2022" r:id="rId9"/>
-    <p:sldId id="286" r:id="rId10"/>
+    <p:sldId id="2024" r:id="rId10"/>
+    <p:sldId id="2023" r:id="rId11"/>
+    <p:sldId id="286" r:id="rId12"/>
   </p:sldIdLst>
   <p:sldSz cx="9906000" cy="6858000" type="A4"/>
   <p:notesSz cx="7315200" cy="9601200"/>
@@ -270,6 +272,8 @@
           <p14:sldIdLst>
             <p14:sldId id="2019"/>
             <p14:sldId id="2022"/>
+            <p14:sldId id="2024"/>
+            <p14:sldId id="2023"/>
           </p14:sldIdLst>
         </p14:section>
         <p14:section name="End" id="{33EEDC85-A799-4CB3-BF13-F4955B8630BE}">
@@ -1621,6 +1625,246 @@
 </p:notes>
 </file>
 
+<file path=ppt/notesSlides/notesSlide10.xml><?xml version="1.0" encoding="utf-8"?>
+<p:notes xmlns:a="http://schemas.openxmlformats.org/drawingml/2006/main" xmlns:r="http://schemas.openxmlformats.org/officeDocument/2006/relationships" xmlns:p="http://schemas.openxmlformats.org/presentationml/2006/main">
+  <p:cSld>
+    <p:spTree>
+      <p:nvGrpSpPr>
+        <p:cNvPr id="1" name="">
+          <a:extLst>
+            <a:ext uri="{FF2B5EF4-FFF2-40B4-BE49-F238E27FC236}">
+              <a16:creationId xmlns:a16="http://schemas.microsoft.com/office/drawing/2014/main" id="{9A851A70-D7FF-B69E-2F1F-5276D7F44C59}"/>
+            </a:ext>
+          </a:extLst>
+        </p:cNvPr>
+        <p:cNvGrpSpPr/>
+        <p:nvPr/>
+      </p:nvGrpSpPr>
+      <p:grpSpPr>
+        <a:xfrm>
+          <a:off x="0" y="0"/>
+          <a:ext cx="0" cy="0"/>
+          <a:chOff x="0" y="0"/>
+          <a:chExt cx="0" cy="0"/>
+        </a:xfrm>
+      </p:grpSpPr>
+      <p:sp>
+        <p:nvSpPr>
+          <p:cNvPr id="2" name="投影片影像版面配置區 1">
+            <a:extLst>
+              <a:ext uri="{FF2B5EF4-FFF2-40B4-BE49-F238E27FC236}">
+                <a16:creationId xmlns:a16="http://schemas.microsoft.com/office/drawing/2014/main" id="{4FB2E1DE-40DE-B1BA-7135-64BFFB1631B9}"/>
+              </a:ext>
+            </a:extLst>
+          </p:cNvPr>
+          <p:cNvSpPr>
+            <a:spLocks noGrp="1" noRot="1" noChangeAspect="1"/>
+          </p:cNvSpPr>
+          <p:nvPr>
+            <p:ph type="sldImg"/>
+          </p:nvPr>
+        </p:nvSpPr>
+        <p:spPr/>
+      </p:sp>
+      <p:sp>
+        <p:nvSpPr>
+          <p:cNvPr id="3" name="備忘稿版面配置區 2">
+            <a:extLst>
+              <a:ext uri="{FF2B5EF4-FFF2-40B4-BE49-F238E27FC236}">
+                <a16:creationId xmlns:a16="http://schemas.microsoft.com/office/drawing/2014/main" id="{C4F8DB8E-F5F1-21EB-D41F-2C635FB715D5}"/>
+              </a:ext>
+            </a:extLst>
+          </p:cNvPr>
+          <p:cNvSpPr>
+            <a:spLocks noGrp="1"/>
+          </p:cNvSpPr>
+          <p:nvPr>
+            <p:ph type="body" idx="1"/>
+          </p:nvPr>
+        </p:nvSpPr>
+        <p:spPr/>
+        <p:txBody>
+          <a:bodyPr/>
+          <a:lstStyle/>
+          <a:p>
+            <a:pPr marL="0" indent="0"/>
+            <a:r>
+              <a:rPr lang="en-US" altLang="zh-TW" dirty="0" err="1"/>
+              <a:t>DisplayCAL</a:t>
+            </a:r>
+            <a:r>
+              <a:rPr lang="en-US" altLang="zh-TW" dirty="0"/>
+              <a:t> </a:t>
+            </a:r>
+            <a:r>
+              <a:rPr lang="zh-TW" altLang="en-US" dirty="0"/>
+              <a:t>無法量測 </a:t>
+            </a:r>
+            <a:r>
+              <a:rPr lang="en-US" altLang="zh-TW" dirty="0"/>
+              <a:t>DICOM</a:t>
+            </a:r>
+            <a:r>
+              <a:rPr lang="zh-TW" altLang="en-US" dirty="0"/>
+              <a:t> 所以並無數據</a:t>
+            </a:r>
+          </a:p>
+        </p:txBody>
+      </p:sp>
+      <p:sp>
+        <p:nvSpPr>
+          <p:cNvPr id="4" name="投影片編號版面配置區 3">
+            <a:extLst>
+              <a:ext uri="{FF2B5EF4-FFF2-40B4-BE49-F238E27FC236}">
+                <a16:creationId xmlns:a16="http://schemas.microsoft.com/office/drawing/2014/main" id="{A81AD260-1FA1-46D2-EEFC-6CE390861C06}"/>
+              </a:ext>
+            </a:extLst>
+          </p:cNvPr>
+          <p:cNvSpPr>
+            <a:spLocks noGrp="1"/>
+          </p:cNvSpPr>
+          <p:nvPr>
+            <p:ph type="sldNum" idx="12"/>
+          </p:nvPr>
+        </p:nvSpPr>
+        <p:spPr/>
+        <p:txBody>
+          <a:bodyPr/>
+          <a:lstStyle/>
+          <a:p>
+            <a:pPr marL="0" marR="0" lvl="0" indent="0" algn="r" rtl="0">
+              <a:spcBef>
+                <a:spcPts val="0"/>
+              </a:spcBef>
+              <a:spcAft>
+                <a:spcPts val="0"/>
+              </a:spcAft>
+              <a:buNone/>
+            </a:pPr>
+            <a:fld id="{00000000-1234-1234-1234-123412341234}" type="slidenum">
+              <a:rPr lang="en-US" sz="2000" b="0" i="0" u="none" strike="noStrike" cap="none" smtClean="0">
+                <a:solidFill>
+                  <a:schemeClr val="dk1"/>
+                </a:solidFill>
+                <a:latin typeface="Times New Roman"/>
+                <a:ea typeface="Times New Roman"/>
+                <a:cs typeface="Times New Roman"/>
+                <a:sym typeface="Times New Roman"/>
+              </a:rPr>
+              <a:t>10</a:t>
+            </a:fld>
+            <a:endParaRPr lang="en-US" sz="2000" b="0" i="0" u="none" strike="noStrike" cap="none" dirty="0">
+              <a:solidFill>
+                <a:schemeClr val="dk1"/>
+              </a:solidFill>
+              <a:latin typeface="Times New Roman"/>
+              <a:ea typeface="Times New Roman"/>
+              <a:cs typeface="Times New Roman"/>
+              <a:sym typeface="Times New Roman"/>
+            </a:endParaRPr>
+          </a:p>
+        </p:txBody>
+      </p:sp>
+    </p:spTree>
+    <p:extLst>
+      <p:ext uri="{BB962C8B-B14F-4D97-AF65-F5344CB8AC3E}">
+        <p14:creationId xmlns:p14="http://schemas.microsoft.com/office/powerpoint/2010/main" val="239197680"/>
+      </p:ext>
+    </p:extLst>
+  </p:cSld>
+  <p:clrMapOvr>
+    <a:masterClrMapping/>
+  </p:clrMapOvr>
+</p:notes>
+</file>
+
+<file path=ppt/notesSlides/notesSlide11.xml><?xml version="1.0" encoding="utf-8"?>
+<p:notes xmlns:a="http://schemas.openxmlformats.org/drawingml/2006/main" xmlns:r="http://schemas.openxmlformats.org/officeDocument/2006/relationships" xmlns:p="http://schemas.openxmlformats.org/presentationml/2006/main">
+  <p:cSld>
+    <p:spTree>
+      <p:nvGrpSpPr>
+        <p:cNvPr id="1" name=""/>
+        <p:cNvGrpSpPr/>
+        <p:nvPr/>
+      </p:nvGrpSpPr>
+      <p:grpSpPr>
+        <a:xfrm>
+          <a:off x="0" y="0"/>
+          <a:ext cx="0" cy="0"/>
+          <a:chOff x="0" y="0"/>
+          <a:chExt cx="0" cy="0"/>
+        </a:xfrm>
+      </p:grpSpPr>
+      <p:sp>
+        <p:nvSpPr>
+          <p:cNvPr id="1048641" name="投影片影像版面配置區 1"/>
+          <p:cNvSpPr>
+            <a:spLocks noGrp="1" noRot="1" noChangeAspect="1"/>
+          </p:cNvSpPr>
+          <p:nvPr>
+            <p:ph type="sldImg"/>
+          </p:nvPr>
+        </p:nvSpPr>
+        <p:spPr/>
+      </p:sp>
+      <p:sp>
+        <p:nvSpPr>
+          <p:cNvPr id="1048642" name="備忘稿版面配置區 2"/>
+          <p:cNvSpPr>
+            <a:spLocks noGrp="1"/>
+          </p:cNvSpPr>
+          <p:nvPr>
+            <p:ph type="body" idx="1"/>
+          </p:nvPr>
+        </p:nvSpPr>
+        <p:spPr/>
+        <p:txBody>
+          <a:bodyPr/>
+          <a:lstStyle/>
+          <a:p>
+            <a:pPr marL="228600" indent="0">
+              <a:buNone/>
+            </a:pPr>
+            <a:endParaRPr lang="en-US" altLang="zh-TW" dirty="0"/>
+          </a:p>
+        </p:txBody>
+      </p:sp>
+      <p:sp>
+        <p:nvSpPr>
+          <p:cNvPr id="1048643" name="投影片編號版面配置區 3"/>
+          <p:cNvSpPr>
+            <a:spLocks noGrp="1"/>
+          </p:cNvSpPr>
+          <p:nvPr>
+            <p:ph type="sldNum" sz="quarter" idx="5"/>
+          </p:nvPr>
+        </p:nvSpPr>
+        <p:spPr/>
+        <p:txBody>
+          <a:bodyPr/>
+          <a:lstStyle/>
+          <a:p>
+            <a:fld id="{F5753A29-9D77-4C26-8BEC-432FE5D4B0A4}" type="slidenum">
+              <a:rPr lang="en-US" altLang="zh-TW" smtClean="0"/>
+              <a:t>11</a:t>
+            </a:fld>
+            <a:endParaRPr lang="en-US" altLang="zh-TW" dirty="0"/>
+          </a:p>
+        </p:txBody>
+      </p:sp>
+    </p:spTree>
+    <p:extLst>
+      <p:ext uri="{BB962C8B-B14F-4D97-AF65-F5344CB8AC3E}">
+        <p14:creationId xmlns:p14="http://schemas.microsoft.com/office/powerpoint/2010/main" val="1154148578"/>
+      </p:ext>
+    </p:extLst>
+  </p:cSld>
+  <p:clrMapOvr>
+    <a:masterClrMapping/>
+  </p:clrMapOvr>
+</p:notes>
+</file>
+
 <file path=ppt/notesSlides/notesSlide2.xml><?xml version="1.0" encoding="utf-8"?>
 <p:notes xmlns:a="http://schemas.openxmlformats.org/drawingml/2006/main" xmlns:r="http://schemas.openxmlformats.org/officeDocument/2006/relationships" xmlns:p="http://schemas.openxmlformats.org/presentationml/2006/main">
   <p:cSld>
@@ -2837,7 +3081,13 @@
   <p:cSld>
     <p:spTree>
       <p:nvGrpSpPr>
-        <p:cNvPr id="1" name=""/>
+        <p:cNvPr id="1" name="">
+          <a:extLst>
+            <a:ext uri="{FF2B5EF4-FFF2-40B4-BE49-F238E27FC236}">
+              <a16:creationId xmlns:a16="http://schemas.microsoft.com/office/drawing/2014/main" id="{9A851A70-D7FF-B69E-2F1F-5276D7F44C59}"/>
+            </a:ext>
+          </a:extLst>
+        </p:cNvPr>
         <p:cNvGrpSpPr/>
         <p:nvPr/>
       </p:nvGrpSpPr>
@@ -2851,7 +3101,13 @@
       </p:grpSpPr>
       <p:sp>
         <p:nvSpPr>
-          <p:cNvPr id="1048641" name="投影片影像版面配置區 1"/>
+          <p:cNvPr id="2" name="投影片影像版面配置區 1">
+            <a:extLst>
+              <a:ext uri="{FF2B5EF4-FFF2-40B4-BE49-F238E27FC236}">
+                <a16:creationId xmlns:a16="http://schemas.microsoft.com/office/drawing/2014/main" id="{4FB2E1DE-40DE-B1BA-7135-64BFFB1631B9}"/>
+              </a:ext>
+            </a:extLst>
+          </p:cNvPr>
           <p:cNvSpPr>
             <a:spLocks noGrp="1" noRot="1" noChangeAspect="1"/>
           </p:cNvSpPr>
@@ -2863,7 +3119,13 @@
       </p:sp>
       <p:sp>
         <p:nvSpPr>
-          <p:cNvPr id="1048642" name="備忘稿版面配置區 2"/>
+          <p:cNvPr id="3" name="備忘稿版面配置區 2">
+            <a:extLst>
+              <a:ext uri="{FF2B5EF4-FFF2-40B4-BE49-F238E27FC236}">
+                <a16:creationId xmlns:a16="http://schemas.microsoft.com/office/drawing/2014/main" id="{C4F8DB8E-F5F1-21EB-D41F-2C635FB715D5}"/>
+              </a:ext>
+            </a:extLst>
+          </p:cNvPr>
           <p:cNvSpPr>
             <a:spLocks noGrp="1"/>
           </p:cNvSpPr>
@@ -2876,21 +3138,44 @@
           <a:bodyPr/>
           <a:lstStyle/>
           <a:p>
-            <a:pPr marL="228600" indent="0">
-              <a:buNone/>
-            </a:pPr>
-            <a:endParaRPr lang="en-US" altLang="zh-TW" dirty="0"/>
+            <a:pPr marL="0" indent="0"/>
+            <a:r>
+              <a:rPr lang="en-US" altLang="zh-TW" dirty="0" err="1"/>
+              <a:t>DisplayCAL</a:t>
+            </a:r>
+            <a:r>
+              <a:rPr lang="en-US" altLang="zh-TW" dirty="0"/>
+              <a:t> </a:t>
+            </a:r>
+            <a:r>
+              <a:rPr lang="zh-TW" altLang="en-US" dirty="0"/>
+              <a:t>無法量測 </a:t>
+            </a:r>
+            <a:r>
+              <a:rPr lang="en-US" altLang="zh-TW" dirty="0"/>
+              <a:t>DICOM</a:t>
+            </a:r>
+            <a:r>
+              <a:rPr lang="zh-TW" altLang="en-US" dirty="0"/>
+              <a:t> 所以並無數據</a:t>
+            </a:r>
           </a:p>
         </p:txBody>
       </p:sp>
       <p:sp>
         <p:nvSpPr>
-          <p:cNvPr id="1048643" name="投影片編號版面配置區 3"/>
+          <p:cNvPr id="4" name="投影片編號版面配置區 3">
+            <a:extLst>
+              <a:ext uri="{FF2B5EF4-FFF2-40B4-BE49-F238E27FC236}">
+                <a16:creationId xmlns:a16="http://schemas.microsoft.com/office/drawing/2014/main" id="{A81AD260-1FA1-46D2-EEFC-6CE390861C06}"/>
+              </a:ext>
+            </a:extLst>
+          </p:cNvPr>
           <p:cNvSpPr>
             <a:spLocks noGrp="1"/>
           </p:cNvSpPr>
           <p:nvPr>
-            <p:ph type="sldNum" sz="quarter" idx="5"/>
+            <p:ph type="sldNum" idx="12"/>
           </p:nvPr>
         </p:nvSpPr>
         <p:spPr/>
@@ -2898,18 +3183,43 @@
           <a:bodyPr/>
           <a:lstStyle/>
           <a:p>
-            <a:fld id="{F5753A29-9D77-4C26-8BEC-432FE5D4B0A4}" type="slidenum">
-              <a:rPr lang="en-US" altLang="zh-TW" smtClean="0"/>
+            <a:pPr marL="0" marR="0" lvl="0" indent="0" algn="r" rtl="0">
+              <a:spcBef>
+                <a:spcPts val="0"/>
+              </a:spcBef>
+              <a:spcAft>
+                <a:spcPts val="0"/>
+              </a:spcAft>
+              <a:buNone/>
+            </a:pPr>
+            <a:fld id="{00000000-1234-1234-1234-123412341234}" type="slidenum">
+              <a:rPr lang="en-US" sz="2000" b="0" i="0" u="none" strike="noStrike" cap="none" smtClean="0">
+                <a:solidFill>
+                  <a:schemeClr val="dk1"/>
+                </a:solidFill>
+                <a:latin typeface="Times New Roman"/>
+                <a:ea typeface="Times New Roman"/>
+                <a:cs typeface="Times New Roman"/>
+                <a:sym typeface="Times New Roman"/>
+              </a:rPr>
               <a:t>9</a:t>
             </a:fld>
-            <a:endParaRPr lang="en-US" altLang="zh-TW" dirty="0"/>
+            <a:endParaRPr lang="en-US" sz="2000" b="0" i="0" u="none" strike="noStrike" cap="none" dirty="0">
+              <a:solidFill>
+                <a:schemeClr val="dk1"/>
+              </a:solidFill>
+              <a:latin typeface="Times New Roman"/>
+              <a:ea typeface="Times New Roman"/>
+              <a:cs typeface="Times New Roman"/>
+              <a:sym typeface="Times New Roman"/>
+            </a:endParaRPr>
           </a:p>
         </p:txBody>
       </p:sp>
     </p:spTree>
     <p:extLst>
       <p:ext uri="{BB962C8B-B14F-4D97-AF65-F5344CB8AC3E}">
-        <p14:creationId xmlns:p14="http://schemas.microsoft.com/office/powerpoint/2010/main" val="1154148578"/>
+        <p14:creationId xmlns:p14="http://schemas.microsoft.com/office/powerpoint/2010/main" val="1474904330"/>
       </p:ext>
     </p:extLst>
   </p:cSld>
@@ -7896,6 +8206,244 @@
 </p:sld>
 </file>
 
+<file path=ppt/slides/slide10.xml><?xml version="1.0" encoding="utf-8"?>
+<p:sld xmlns:a="http://schemas.openxmlformats.org/drawingml/2006/main" xmlns:r="http://schemas.openxmlformats.org/officeDocument/2006/relationships" xmlns:p="http://schemas.openxmlformats.org/presentationml/2006/main">
+  <p:cSld>
+    <p:spTree>
+      <p:nvGrpSpPr>
+        <p:cNvPr id="1" name="">
+          <a:extLst>
+            <a:ext uri="{FF2B5EF4-FFF2-40B4-BE49-F238E27FC236}">
+              <a16:creationId xmlns:a16="http://schemas.microsoft.com/office/drawing/2014/main" id="{C25E9AAA-7E36-1E17-83F9-FD3A18A28BE9}"/>
+            </a:ext>
+          </a:extLst>
+        </p:cNvPr>
+        <p:cNvGrpSpPr/>
+        <p:nvPr/>
+      </p:nvGrpSpPr>
+      <p:grpSpPr>
+        <a:xfrm>
+          <a:off x="0" y="0"/>
+          <a:ext cx="0" cy="0"/>
+          <a:chOff x="0" y="0"/>
+          <a:chExt cx="0" cy="0"/>
+        </a:xfrm>
+      </p:grpSpPr>
+      <p:sp>
+        <p:nvSpPr>
+          <p:cNvPr id="15" name="標題 1">
+            <a:extLst>
+              <a:ext uri="{FF2B5EF4-FFF2-40B4-BE49-F238E27FC236}">
+                <a16:creationId xmlns:a16="http://schemas.microsoft.com/office/drawing/2014/main" id="{142C8726-E890-9988-40FC-8984FDA21FEE}"/>
+              </a:ext>
+            </a:extLst>
+          </p:cNvPr>
+          <p:cNvSpPr>
+            <a:spLocks noGrp="1"/>
+          </p:cNvSpPr>
+          <p:nvPr>
+            <p:ph type="title"/>
+          </p:nvPr>
+        </p:nvSpPr>
+        <p:spPr>
+          <a:xfrm>
+            <a:off x="609602" y="609600"/>
+            <a:ext cx="8077200" cy="533400"/>
+          </a:xfrm>
+          <a:ln>
+            <a:noFill/>
+          </a:ln>
+        </p:spPr>
+        <p:txBody>
+          <a:bodyPr/>
+          <a:lstStyle/>
+          <a:p>
+            <a:r>
+              <a:rPr lang="zh-TW" altLang="en-US" dirty="0">
+                <a:latin typeface="Times New Roman" panose="02020603050405020304" pitchFamily="18" charset="0"/>
+                <a:ea typeface="標楷體" panose="03000509000000000000" pitchFamily="65" charset="-120"/>
+                <a:cs typeface="Times New Roman" panose="02020603050405020304" pitchFamily="18" charset="0"/>
+              </a:rPr>
+              <a:t>本次進度</a:t>
+            </a:r>
+            <a:r>
+              <a:rPr lang="en-US" altLang="zh-TW" dirty="0">
+                <a:latin typeface="Times New Roman" panose="02020603050405020304" pitchFamily="18" charset="0"/>
+                <a:ea typeface="標楷體" panose="03000509000000000000" pitchFamily="65" charset="-120"/>
+                <a:cs typeface="Times New Roman" panose="02020603050405020304" pitchFamily="18" charset="0"/>
+              </a:rPr>
+              <a:t>: VCGT</a:t>
+            </a:r>
+            <a:r>
+              <a:rPr lang="zh-TW" altLang="en-US" dirty="0">
+                <a:latin typeface="Times New Roman" panose="02020603050405020304" pitchFamily="18" charset="0"/>
+                <a:ea typeface="標楷體" panose="03000509000000000000" pitchFamily="65" charset="-120"/>
+                <a:cs typeface="Times New Roman" panose="02020603050405020304" pitchFamily="18" charset="0"/>
+              </a:rPr>
+              <a:t> </a:t>
+            </a:r>
+            <a:r>
+              <a:rPr lang="en-US" altLang="zh-TW" dirty="0">
+                <a:latin typeface="Times New Roman" panose="02020603050405020304" pitchFamily="18" charset="0"/>
+                <a:ea typeface="標楷體" panose="03000509000000000000" pitchFamily="65" charset="-120"/>
+                <a:cs typeface="Times New Roman" panose="02020603050405020304" pitchFamily="18" charset="0"/>
+              </a:rPr>
+              <a:t>flow</a:t>
+            </a:r>
+            <a:r>
+              <a:rPr lang="zh-TW" altLang="en-US" dirty="0">
+                <a:latin typeface="Times New Roman" panose="02020603050405020304" pitchFamily="18" charset="0"/>
+                <a:ea typeface="標楷體" panose="03000509000000000000" pitchFamily="65" charset="-120"/>
+                <a:cs typeface="Times New Roman" panose="02020603050405020304" pitchFamily="18" charset="0"/>
+              </a:rPr>
+              <a:t> </a:t>
+            </a:r>
+            <a:r>
+              <a:rPr lang="en-US" altLang="zh-TW" dirty="0">
+                <a:latin typeface="Times New Roman" panose="02020603050405020304" pitchFamily="18" charset="0"/>
+                <a:ea typeface="標楷體" panose="03000509000000000000" pitchFamily="65" charset="-120"/>
+                <a:cs typeface="Times New Roman" panose="02020603050405020304" pitchFamily="18" charset="0"/>
+              </a:rPr>
+              <a:t>chart</a:t>
+            </a:r>
+            <a:endParaRPr lang="zh-TW" altLang="en-US" dirty="0">
+              <a:latin typeface="Times New Roman" panose="02020603050405020304" pitchFamily="18" charset="0"/>
+              <a:ea typeface="標楷體" panose="03000509000000000000" pitchFamily="65" charset="-120"/>
+              <a:cs typeface="Times New Roman" panose="02020603050405020304" pitchFamily="18" charset="0"/>
+            </a:endParaRPr>
+          </a:p>
+        </p:txBody>
+      </p:sp>
+    </p:spTree>
+    <p:extLst>
+      <p:ext uri="{BB962C8B-B14F-4D97-AF65-F5344CB8AC3E}">
+        <p14:creationId xmlns:p14="http://schemas.microsoft.com/office/powerpoint/2010/main" val="2195863006"/>
+      </p:ext>
+    </p:extLst>
+  </p:cSld>
+  <p:clrMapOvr>
+    <a:masterClrMapping/>
+  </p:clrMapOvr>
+</p:sld>
+</file>
+
+<file path=ppt/slides/slide11.xml><?xml version="1.0" encoding="utf-8"?>
+<p:sld xmlns:a="http://schemas.openxmlformats.org/drawingml/2006/main" xmlns:r="http://schemas.openxmlformats.org/officeDocument/2006/relationships" xmlns:p="http://schemas.openxmlformats.org/presentationml/2006/main">
+  <p:cSld>
+    <p:spTree>
+      <p:nvGrpSpPr>
+        <p:cNvPr id="1" name=""/>
+        <p:cNvGrpSpPr/>
+        <p:nvPr/>
+      </p:nvGrpSpPr>
+      <p:grpSpPr>
+        <a:xfrm>
+          <a:off x="0" y="0"/>
+          <a:ext cx="0" cy="0"/>
+          <a:chOff x="0" y="0"/>
+          <a:chExt cx="0" cy="0"/>
+        </a:xfrm>
+      </p:grpSpPr>
+      <p:pic>
+        <p:nvPicPr>
+          <p:cNvPr id="2097164" name="圖片 6"/>
+          <p:cNvPicPr>
+            <a:picLocks noChangeAspect="1"/>
+          </p:cNvPicPr>
+          <p:nvPr/>
+        </p:nvPicPr>
+        <p:blipFill>
+          <a:blip r:embed="rId3"/>
+          <a:srcRect/>
+          <a:stretch>
+            <a:fillRect/>
+          </a:stretch>
+        </p:blipFill>
+        <p:spPr bwMode="auto">
+          <a:xfrm>
+            <a:off x="3357746" y="3004771"/>
+            <a:ext cx="5556738" cy="848458"/>
+          </a:xfrm>
+          <a:prstGeom prst="rect">
+            <a:avLst/>
+          </a:prstGeom>
+          <a:effectLst>
+            <a:outerShdw blurRad="50800" dist="38100" dir="5400000" algn="t" rotWithShape="0">
+              <a:prstClr val="black">
+                <a:alpha val="40000"/>
+              </a:prstClr>
+            </a:outerShdw>
+          </a:effectLst>
+        </p:spPr>
+      </p:pic>
+      <p:pic>
+        <p:nvPicPr>
+          <p:cNvPr id="2097165" name="Picture 2" descr="http://www.secretariat.ntust.edu.tw/ezfiles/20/1020/img/1688/09.png"/>
+          <p:cNvPicPr>
+            <a:picLocks noChangeAspect="1" noChangeArrowheads="1"/>
+          </p:cNvPicPr>
+          <p:nvPr/>
+        </p:nvPicPr>
+        <p:blipFill>
+          <a:blip r:embed="rId4" cstate="print"/>
+          <a:srcRect/>
+          <a:stretch>
+            <a:fillRect/>
+          </a:stretch>
+        </p:blipFill>
+        <p:spPr bwMode="auto">
+          <a:xfrm>
+            <a:off x="964866" y="1628181"/>
+            <a:ext cx="6260123" cy="1186962"/>
+          </a:xfrm>
+          <a:prstGeom prst="rect">
+            <a:avLst/>
+          </a:prstGeom>
+          <a:noFill/>
+          <a:ln>
+            <a:noFill/>
+          </a:ln>
+          <a:effectLst>
+            <a:outerShdw blurRad="63500" sx="102000" sy="102000" algn="ctr" rotWithShape="0">
+              <a:prstClr val="black">
+                <a:alpha val="40000"/>
+              </a:prstClr>
+            </a:outerShdw>
+          </a:effectLst>
+        </p:spPr>
+      </p:pic>
+      <p:pic>
+        <p:nvPicPr>
+          <p:cNvPr id="2097166" name="圖片 7"/>
+          <p:cNvPicPr>
+            <a:picLocks noChangeAspect="1"/>
+          </p:cNvPicPr>
+          <p:nvPr/>
+        </p:nvPicPr>
+        <p:blipFill>
+          <a:blip r:embed="rId5"/>
+          <a:stretch>
+            <a:fillRect/>
+          </a:stretch>
+        </p:blipFill>
+        <p:spPr>
+          <a:xfrm>
+            <a:off x="2493650" y="4226628"/>
+            <a:ext cx="4266522" cy="930565"/>
+          </a:xfrm>
+          <a:prstGeom prst="rect">
+            <a:avLst/>
+          </a:prstGeom>
+        </p:spPr>
+      </p:pic>
+    </p:spTree>
+  </p:cSld>
+  <p:clrMapOvr>
+    <a:masterClrMapping/>
+  </p:clrMapOvr>
+</p:sld>
+</file>
+
 <file path=ppt/slides/slide2.xml><?xml version="1.0" encoding="utf-8"?>
 <p:sld xmlns:a="http://schemas.openxmlformats.org/drawingml/2006/main" xmlns:r="http://schemas.openxmlformats.org/officeDocument/2006/relationships" xmlns:p="http://schemas.openxmlformats.org/presentationml/2006/main">
   <p:cSld>
@@ -13793,20 +14341,12 @@
               <a:t>: </a:t>
             </a:r>
             <a:r>
-              <a:rPr lang="en-US" altLang="zh-TW" dirty="0" err="1">
+              <a:rPr lang="zh-TW" altLang="en-US" dirty="0">
                 <a:latin typeface="Times New Roman" panose="02020603050405020304" pitchFamily="18" charset="0"/>
                 <a:ea typeface="標楷體" panose="03000509000000000000" pitchFamily="65" charset="-120"/>
                 <a:cs typeface="Times New Roman" panose="02020603050405020304" pitchFamily="18" charset="0"/>
               </a:rPr>
-              <a:t>DisplayCAL</a:t>
-            </a:r>
-            <a:r>
-              <a:rPr lang="zh-TW" altLang="en-US" dirty="0">
-                <a:latin typeface="Times New Roman" panose="02020603050405020304" pitchFamily="18" charset="0"/>
-                <a:ea typeface="標楷體" panose="03000509000000000000" pitchFamily="65" charset="-120"/>
-                <a:cs typeface="Times New Roman" panose="02020603050405020304" pitchFamily="18" charset="0"/>
-              </a:rPr>
-              <a:t> </a:t>
+              <a:t>軟體校正結果</a:t>
             </a:r>
           </a:p>
         </p:txBody>
@@ -15127,7 +15667,13 @@
   <p:cSld>
     <p:spTree>
       <p:nvGrpSpPr>
-        <p:cNvPr id="1" name=""/>
+        <p:cNvPr id="1" name="">
+          <a:extLst>
+            <a:ext uri="{FF2B5EF4-FFF2-40B4-BE49-F238E27FC236}">
+              <a16:creationId xmlns:a16="http://schemas.microsoft.com/office/drawing/2014/main" id="{C25E9AAA-7E36-1E17-83F9-FD3A18A28BE9}"/>
+            </a:ext>
+          </a:extLst>
+        </p:cNvPr>
         <p:cNvGrpSpPr/>
         <p:nvPr/>
       </p:nvGrpSpPr>
@@ -15139,57 +15685,22 @@
           <a:chExt cx="0" cy="0"/>
         </a:xfrm>
       </p:grpSpPr>
-      <p:pic>
-        <p:nvPicPr>
-          <p:cNvPr id="2097164" name="圖片 6"/>
-          <p:cNvPicPr>
-            <a:picLocks noChangeAspect="1"/>
-          </p:cNvPicPr>
+      <p:sp>
+        <p:nvSpPr>
+          <p:cNvPr id="7" name="文字版面配置區 6">
+            <a:extLst>
+              <a:ext uri="{FF2B5EF4-FFF2-40B4-BE49-F238E27FC236}">
+                <a16:creationId xmlns:a16="http://schemas.microsoft.com/office/drawing/2014/main" id="{B361B4DF-3145-D829-F41F-4DFE4B01E588}"/>
+              </a:ext>
+            </a:extLst>
+          </p:cNvPr>
+          <p:cNvSpPr txBox="1"/>
           <p:nvPr/>
-        </p:nvPicPr>
-        <p:blipFill>
-          <a:blip r:embed="rId3"/>
-          <a:srcRect/>
-          <a:stretch>
-            <a:fillRect/>
-          </a:stretch>
-        </p:blipFill>
-        <p:spPr bwMode="auto">
+        </p:nvSpPr>
+        <p:spPr>
           <a:xfrm>
-            <a:off x="3357746" y="3004771"/>
-            <a:ext cx="5556738" cy="848458"/>
-          </a:xfrm>
-          <a:prstGeom prst="rect">
-            <a:avLst/>
-          </a:prstGeom>
-          <a:effectLst>
-            <a:outerShdw blurRad="50800" dist="38100" dir="5400000" algn="t" rotWithShape="0">
-              <a:prstClr val="black">
-                <a:alpha val="40000"/>
-              </a:prstClr>
-            </a:outerShdw>
-          </a:effectLst>
-        </p:spPr>
-      </p:pic>
-      <p:pic>
-        <p:nvPicPr>
-          <p:cNvPr id="2097165" name="Picture 2" descr="http://www.secretariat.ntust.edu.tw/ezfiles/20/1020/img/1688/09.png"/>
-          <p:cNvPicPr>
-            <a:picLocks noChangeAspect="1" noChangeArrowheads="1"/>
-          </p:cNvPicPr>
-          <p:nvPr/>
-        </p:nvPicPr>
-        <p:blipFill>
-          <a:blip r:embed="rId4" cstate="print"/>
-          <a:srcRect/>
-          <a:stretch>
-            <a:fillRect/>
-          </a:stretch>
-        </p:blipFill>
-        <p:spPr bwMode="auto">
-          <a:xfrm>
-            <a:off x="964866" y="1628181"/>
-            <a:ext cx="6260123" cy="1186962"/>
+            <a:off x="609602" y="935857"/>
+            <a:ext cx="8686796" cy="4700685"/>
           </a:xfrm>
           <a:prstGeom prst="rect">
             <a:avLst/>
@@ -15198,40 +15709,381 @@
           <a:ln>
             <a:noFill/>
           </a:ln>
-          <a:effectLst>
-            <a:outerShdw blurRad="63500" sx="102000" sy="102000" algn="ctr" rotWithShape="0">
-              <a:prstClr val="black">
-                <a:alpha val="40000"/>
-              </a:prstClr>
-            </a:outerShdw>
-          </a:effectLst>
         </p:spPr>
-      </p:pic>
-      <p:pic>
-        <p:nvPicPr>
-          <p:cNvPr id="2097166" name="圖片 7"/>
-          <p:cNvPicPr>
-            <a:picLocks noChangeAspect="1"/>
-          </p:cNvPicPr>
-          <p:nvPr/>
-        </p:nvPicPr>
-        <p:blipFill>
-          <a:blip r:embed="rId5"/>
-          <a:stretch>
-            <a:fillRect/>
-          </a:stretch>
-        </p:blipFill>
+        <p:txBody>
+          <a:bodyPr spcFirstLastPara="1" wrap="square" lIns="91425" tIns="45700" rIns="91425" bIns="45700" anchor="t" anchorCtr="0">
+            <a:noAutofit/>
+          </a:bodyPr>
+          <a:lstStyle>
+            <a:defPPr marR="0" lvl="0" algn="l" rtl="0">
+              <a:lnSpc>
+                <a:spcPct val="100000"/>
+              </a:lnSpc>
+              <a:spcBef>
+                <a:spcPts val="0"/>
+              </a:spcBef>
+              <a:spcAft>
+                <a:spcPts val="0"/>
+              </a:spcAft>
+            </a:defPPr>
+            <a:lvl1pPr marL="457200" marR="0" lvl="0" indent="-406400" algn="l" rtl="0">
+              <a:lnSpc>
+                <a:spcPct val="100000"/>
+              </a:lnSpc>
+              <a:spcBef>
+                <a:spcPts val="560"/>
+              </a:spcBef>
+              <a:spcAft>
+                <a:spcPts val="0"/>
+              </a:spcAft>
+              <a:buClr>
+                <a:schemeClr val="accent2"/>
+              </a:buClr>
+              <a:buSzPts val="2800"/>
+              <a:buFont typeface="Noto Sans Symbols"/>
+              <a:buChar char="❖"/>
+              <a:defRPr sz="2800" b="0" i="0" u="none" strike="noStrike" cap="none">
+                <a:solidFill>
+                  <a:schemeClr val="dk1"/>
+                </a:solidFill>
+                <a:latin typeface="Times New Roman"/>
+                <a:ea typeface="Times New Roman"/>
+                <a:cs typeface="Times New Roman"/>
+                <a:sym typeface="Times New Roman"/>
+              </a:defRPr>
+            </a:lvl1pPr>
+            <a:lvl2pPr marL="914400" marR="0" lvl="1" indent="-381000" algn="l" rtl="0">
+              <a:lnSpc>
+                <a:spcPct val="100000"/>
+              </a:lnSpc>
+              <a:spcBef>
+                <a:spcPts val="480"/>
+              </a:spcBef>
+              <a:spcAft>
+                <a:spcPts val="0"/>
+              </a:spcAft>
+              <a:buClr>
+                <a:srgbClr val="FF5050"/>
+              </a:buClr>
+              <a:buSzPts val="2400"/>
+              <a:buFont typeface="Noto Sans Symbols"/>
+              <a:buChar char="▪"/>
+              <a:defRPr sz="2400" b="0" i="0" u="none" strike="noStrike" cap="none">
+                <a:solidFill>
+                  <a:schemeClr val="dk1"/>
+                </a:solidFill>
+                <a:latin typeface="Times New Roman"/>
+                <a:ea typeface="Times New Roman"/>
+                <a:cs typeface="Times New Roman"/>
+                <a:sym typeface="Times New Roman"/>
+              </a:defRPr>
+            </a:lvl2pPr>
+            <a:lvl3pPr marL="1371600" marR="0" lvl="2" indent="-355600" algn="l" rtl="0">
+              <a:lnSpc>
+                <a:spcPct val="100000"/>
+              </a:lnSpc>
+              <a:spcBef>
+                <a:spcPts val="400"/>
+              </a:spcBef>
+              <a:spcAft>
+                <a:spcPts val="0"/>
+              </a:spcAft>
+              <a:buClr>
+                <a:srgbClr val="6699FF"/>
+              </a:buClr>
+              <a:buSzPts val="2000"/>
+              <a:buFont typeface="Times New Roman"/>
+              <a:buChar char="•"/>
+              <a:defRPr sz="2000" b="0" i="0" u="none" strike="noStrike" cap="none">
+                <a:solidFill>
+                  <a:schemeClr val="dk1"/>
+                </a:solidFill>
+                <a:latin typeface="Times New Roman"/>
+                <a:ea typeface="Times New Roman"/>
+                <a:cs typeface="Times New Roman"/>
+                <a:sym typeface="Times New Roman"/>
+              </a:defRPr>
+            </a:lvl3pPr>
+            <a:lvl4pPr marL="1828800" marR="0" lvl="3" indent="-355600" algn="l" rtl="0">
+              <a:lnSpc>
+                <a:spcPct val="100000"/>
+              </a:lnSpc>
+              <a:spcBef>
+                <a:spcPts val="400"/>
+              </a:spcBef>
+              <a:spcAft>
+                <a:spcPts val="0"/>
+              </a:spcAft>
+              <a:buClr>
+                <a:srgbClr val="FF5050"/>
+              </a:buClr>
+              <a:buSzPts val="2000"/>
+              <a:buFont typeface="Times New Roman"/>
+              <a:buChar char="o"/>
+              <a:defRPr sz="2000" b="0" i="0" u="none" strike="noStrike" cap="none">
+                <a:solidFill>
+                  <a:schemeClr val="dk1"/>
+                </a:solidFill>
+                <a:latin typeface="Times New Roman"/>
+                <a:ea typeface="Times New Roman"/>
+                <a:cs typeface="Times New Roman"/>
+                <a:sym typeface="Times New Roman"/>
+              </a:defRPr>
+            </a:lvl4pPr>
+            <a:lvl5pPr marL="2286000" marR="0" lvl="4" indent="-355600" algn="l" rtl="0">
+              <a:lnSpc>
+                <a:spcPct val="100000"/>
+              </a:lnSpc>
+              <a:spcBef>
+                <a:spcPts val="400"/>
+              </a:spcBef>
+              <a:spcAft>
+                <a:spcPts val="0"/>
+              </a:spcAft>
+              <a:buClr>
+                <a:srgbClr val="FF5050"/>
+              </a:buClr>
+              <a:buSzPts val="2000"/>
+              <a:buFont typeface="Times New Roman"/>
+              <a:buChar char="o"/>
+              <a:defRPr sz="2000" b="0" i="0" u="none" strike="noStrike" cap="none">
+                <a:solidFill>
+                  <a:schemeClr val="dk1"/>
+                </a:solidFill>
+                <a:latin typeface="Times New Roman"/>
+                <a:ea typeface="Times New Roman"/>
+                <a:cs typeface="Times New Roman"/>
+                <a:sym typeface="Times New Roman"/>
+              </a:defRPr>
+            </a:lvl5pPr>
+            <a:lvl6pPr marL="2743200" marR="0" lvl="5" indent="-355600" algn="l" rtl="0">
+              <a:lnSpc>
+                <a:spcPct val="100000"/>
+              </a:lnSpc>
+              <a:spcBef>
+                <a:spcPts val="400"/>
+              </a:spcBef>
+              <a:spcAft>
+                <a:spcPts val="0"/>
+              </a:spcAft>
+              <a:buClr>
+                <a:srgbClr val="FF5050"/>
+              </a:buClr>
+              <a:buSzPts val="2000"/>
+              <a:buFont typeface="Times New Roman"/>
+              <a:buChar char="o"/>
+              <a:defRPr sz="2000" b="0" i="0" u="none" strike="noStrike" cap="none">
+                <a:solidFill>
+                  <a:schemeClr val="dk1"/>
+                </a:solidFill>
+                <a:latin typeface="Times New Roman"/>
+                <a:ea typeface="Times New Roman"/>
+                <a:cs typeface="Times New Roman"/>
+                <a:sym typeface="Times New Roman"/>
+              </a:defRPr>
+            </a:lvl6pPr>
+            <a:lvl7pPr marL="3200400" marR="0" lvl="6" indent="-355600" algn="l" rtl="0">
+              <a:lnSpc>
+                <a:spcPct val="100000"/>
+              </a:lnSpc>
+              <a:spcBef>
+                <a:spcPts val="400"/>
+              </a:spcBef>
+              <a:spcAft>
+                <a:spcPts val="0"/>
+              </a:spcAft>
+              <a:buClr>
+                <a:srgbClr val="FF5050"/>
+              </a:buClr>
+              <a:buSzPts val="2000"/>
+              <a:buFont typeface="Times New Roman"/>
+              <a:buChar char="o"/>
+              <a:defRPr sz="2000" b="0" i="0" u="none" strike="noStrike" cap="none">
+                <a:solidFill>
+                  <a:schemeClr val="dk1"/>
+                </a:solidFill>
+                <a:latin typeface="Times New Roman"/>
+                <a:ea typeface="Times New Roman"/>
+                <a:cs typeface="Times New Roman"/>
+                <a:sym typeface="Times New Roman"/>
+              </a:defRPr>
+            </a:lvl7pPr>
+            <a:lvl8pPr marL="3657600" marR="0" lvl="7" indent="-355600" algn="l" rtl="0">
+              <a:lnSpc>
+                <a:spcPct val="100000"/>
+              </a:lnSpc>
+              <a:spcBef>
+                <a:spcPts val="400"/>
+              </a:spcBef>
+              <a:spcAft>
+                <a:spcPts val="0"/>
+              </a:spcAft>
+              <a:buClr>
+                <a:srgbClr val="FF5050"/>
+              </a:buClr>
+              <a:buSzPts val="2000"/>
+              <a:buFont typeface="Times New Roman"/>
+              <a:buChar char="o"/>
+              <a:defRPr sz="2000" b="0" i="0" u="none" strike="noStrike" cap="none">
+                <a:solidFill>
+                  <a:schemeClr val="dk1"/>
+                </a:solidFill>
+                <a:latin typeface="Times New Roman"/>
+                <a:ea typeface="Times New Roman"/>
+                <a:cs typeface="Times New Roman"/>
+                <a:sym typeface="Times New Roman"/>
+              </a:defRPr>
+            </a:lvl8pPr>
+            <a:lvl9pPr marL="4114800" marR="0" lvl="8" indent="-355600" algn="l" rtl="0">
+              <a:lnSpc>
+                <a:spcPct val="100000"/>
+              </a:lnSpc>
+              <a:spcBef>
+                <a:spcPts val="400"/>
+              </a:spcBef>
+              <a:spcAft>
+                <a:spcPts val="0"/>
+              </a:spcAft>
+              <a:buClr>
+                <a:srgbClr val="FF5050"/>
+              </a:buClr>
+              <a:buSzPts val="2000"/>
+              <a:buFont typeface="Times New Roman"/>
+              <a:buChar char="o"/>
+              <a:defRPr sz="2000" b="0" i="0" u="none" strike="noStrike" cap="none">
+                <a:solidFill>
+                  <a:schemeClr val="dk1"/>
+                </a:solidFill>
+                <a:latin typeface="Times New Roman"/>
+                <a:ea typeface="Times New Roman"/>
+                <a:cs typeface="Times New Roman"/>
+                <a:sym typeface="Times New Roman"/>
+              </a:defRPr>
+            </a:lvl9pPr>
+          </a:lstStyle>
+          <a:p>
+            <a:pPr>
+              <a:lnSpc>
+                <a:spcPct val="150000"/>
+              </a:lnSpc>
+            </a:pPr>
+            <a:r>
+              <a:rPr lang="en-US" altLang="zh-TW" sz="2000" dirty="0">
+                <a:solidFill>
+                  <a:schemeClr val="tx1"/>
+                </a:solidFill>
+                <a:latin typeface="Times New Roman" panose="02020603050405020304" pitchFamily="18" charset="0"/>
+                <a:ea typeface="標楷體" panose="03000509000000000000" pitchFamily="65" charset="-120"/>
+                <a:cs typeface="Times New Roman" panose="02020603050405020304" pitchFamily="18" charset="0"/>
+              </a:rPr>
+              <a:t>ICC</a:t>
+            </a:r>
+            <a:r>
+              <a:rPr lang="zh-TW" altLang="en-US" sz="2000" dirty="0">
+                <a:solidFill>
+                  <a:schemeClr val="tx1"/>
+                </a:solidFill>
+                <a:latin typeface="Times New Roman" panose="02020603050405020304" pitchFamily="18" charset="0"/>
+                <a:ea typeface="標楷體" panose="03000509000000000000" pitchFamily="65" charset="-120"/>
+                <a:cs typeface="Times New Roman" panose="02020603050405020304" pitchFamily="18" charset="0"/>
+              </a:rPr>
+              <a:t> </a:t>
+            </a:r>
+            <a:r>
+              <a:rPr lang="en-US" altLang="zh-TW" sz="2000" dirty="0">
+                <a:solidFill>
+                  <a:schemeClr val="tx1"/>
+                </a:solidFill>
+                <a:latin typeface="Times New Roman" panose="02020603050405020304" pitchFamily="18" charset="0"/>
+                <a:ea typeface="標楷體" panose="03000509000000000000" pitchFamily="65" charset="-120"/>
+                <a:cs typeface="Times New Roman" panose="02020603050405020304" pitchFamily="18" charset="0"/>
+              </a:rPr>
+              <a:t>Profile </a:t>
+            </a:r>
+            <a:r>
+              <a:rPr lang="zh-TW" altLang="en-US" sz="2000" dirty="0">
+                <a:solidFill>
+                  <a:schemeClr val="tx1"/>
+                </a:solidFill>
+                <a:latin typeface="Times New Roman" panose="02020603050405020304" pitchFamily="18" charset="0"/>
+                <a:ea typeface="標楷體" panose="03000509000000000000" pitchFamily="65" charset="-120"/>
+                <a:cs typeface="Times New Roman" panose="02020603050405020304" pitchFamily="18" charset="0"/>
+              </a:rPr>
+              <a:t>色溫校正</a:t>
+            </a:r>
+            <a:endParaRPr lang="en-US" altLang="zh-TW" sz="2000" dirty="0">
+              <a:solidFill>
+                <a:schemeClr val="tx1"/>
+              </a:solidFill>
+              <a:latin typeface="Times New Roman" panose="02020603050405020304" pitchFamily="18" charset="0"/>
+              <a:ea typeface="標楷體" panose="03000509000000000000" pitchFamily="65" charset="-120"/>
+              <a:cs typeface="Times New Roman" panose="02020603050405020304" pitchFamily="18" charset="0"/>
+            </a:endParaRPr>
+          </a:p>
+        </p:txBody>
+      </p:sp>
+      <p:sp>
+        <p:nvSpPr>
+          <p:cNvPr id="15" name="標題 1">
+            <a:extLst>
+              <a:ext uri="{FF2B5EF4-FFF2-40B4-BE49-F238E27FC236}">
+                <a16:creationId xmlns:a16="http://schemas.microsoft.com/office/drawing/2014/main" id="{142C8726-E890-9988-40FC-8984FDA21FEE}"/>
+              </a:ext>
+            </a:extLst>
+          </p:cNvPr>
+          <p:cNvSpPr>
+            <a:spLocks noGrp="1"/>
+          </p:cNvSpPr>
+          <p:nvPr>
+            <p:ph type="title"/>
+          </p:nvPr>
+        </p:nvSpPr>
         <p:spPr>
           <a:xfrm>
-            <a:off x="2493650" y="4226628"/>
-            <a:ext cx="4266522" cy="930565"/>
+            <a:off x="609602" y="609600"/>
+            <a:ext cx="8077200" cy="533400"/>
           </a:xfrm>
-          <a:prstGeom prst="rect">
-            <a:avLst/>
-          </a:prstGeom>
+          <a:ln>
+            <a:noFill/>
+          </a:ln>
         </p:spPr>
-      </p:pic>
+        <p:txBody>
+          <a:bodyPr/>
+          <a:lstStyle/>
+          <a:p>
+            <a:r>
+              <a:rPr lang="zh-TW" altLang="en-US" dirty="0">
+                <a:latin typeface="Times New Roman" panose="02020603050405020304" pitchFamily="18" charset="0"/>
+                <a:ea typeface="標楷體" panose="03000509000000000000" pitchFamily="65" charset="-120"/>
+                <a:cs typeface="Times New Roman" panose="02020603050405020304" pitchFamily="18" charset="0"/>
+              </a:rPr>
+              <a:t>本次進度</a:t>
+            </a:r>
+            <a:r>
+              <a:rPr lang="en-US" altLang="zh-TW" dirty="0">
+                <a:latin typeface="Times New Roman" panose="02020603050405020304" pitchFamily="18" charset="0"/>
+                <a:ea typeface="標楷體" panose="03000509000000000000" pitchFamily="65" charset="-120"/>
+                <a:cs typeface="Times New Roman" panose="02020603050405020304" pitchFamily="18" charset="0"/>
+              </a:rPr>
+              <a:t>: </a:t>
+            </a:r>
+            <a:r>
+              <a:rPr lang="zh-TW" altLang="en-US" dirty="0">
+                <a:latin typeface="Times New Roman" panose="02020603050405020304" pitchFamily="18" charset="0"/>
+                <a:ea typeface="標楷體" panose="03000509000000000000" pitchFamily="65" charset="-120"/>
+                <a:cs typeface="Times New Roman" panose="02020603050405020304" pitchFamily="18" charset="0"/>
+              </a:rPr>
+              <a:t>軟體校正結果</a:t>
+            </a:r>
+          </a:p>
+        </p:txBody>
+      </p:sp>
     </p:spTree>
+    <p:extLst>
+      <p:ext uri="{BB962C8B-B14F-4D97-AF65-F5344CB8AC3E}">
+        <p14:creationId xmlns:p14="http://schemas.microsoft.com/office/powerpoint/2010/main" val="1471194469"/>
+      </p:ext>
+    </p:extLst>
   </p:cSld>
   <p:clrMapOvr>
     <a:masterClrMapping/>
